--- a/docs/pptx/auc3/ritu-auc3-linsubhr-egfrdisc-anemia3.pptx
+++ b/docs/pptx/auc3/ritu-auc3-linsubhr-egfrdisc-anemia3.pptx
@@ -2443,7 +2443,7 @@
           </p:nvSpPr>
           <p:spPr>
             <a:xfrm>
-              <a:off x="2040316" y="2073503"/>
+              <a:off x="2044638" y="2073503"/>
               <a:ext cx="0" cy="3649639"/>
             </a:xfrm>
             <a:custGeom>
@@ -2486,7 +2486,7 @@
           </p:nvSpPr>
           <p:spPr>
             <a:xfrm>
-              <a:off x="4520982" y="2073503"/>
+              <a:off x="4520586" y="2073503"/>
               <a:ext cx="0" cy="3649639"/>
             </a:xfrm>
             <a:custGeom>
@@ -2529,7 +2529,7 @@
           </p:nvSpPr>
           <p:spPr>
             <a:xfrm>
-              <a:off x="7001648" y="2073503"/>
+              <a:off x="6996534" y="2073503"/>
               <a:ext cx="0" cy="3649639"/>
             </a:xfrm>
             <a:custGeom>
@@ -2787,7 +2787,7 @@
           </p:nvSpPr>
           <p:spPr>
             <a:xfrm>
-              <a:off x="3280649" y="2073503"/>
+              <a:off x="3282612" y="2073503"/>
               <a:ext cx="0" cy="3649639"/>
             </a:xfrm>
             <a:custGeom>
@@ -2830,7 +2830,7 @@
           </p:nvSpPr>
           <p:spPr>
             <a:xfrm>
-              <a:off x="5761315" y="2073503"/>
+              <a:off x="5758560" y="2073503"/>
               <a:ext cx="0" cy="3649639"/>
             </a:xfrm>
             <a:custGeom>
@@ -2873,7 +2873,7 @@
           </p:nvSpPr>
           <p:spPr>
             <a:xfrm>
-              <a:off x="8241981" y="2073503"/>
+              <a:off x="8234508" y="2073503"/>
               <a:ext cx="0" cy="3649639"/>
             </a:xfrm>
             <a:custGeom>
@@ -2917,482 +2917,482 @@
           <p:spPr>
             <a:xfrm>
               <a:off x="1172049" y="2073503"/>
-              <a:ext cx="7090630" cy="3415556"/>
+              <a:ext cx="7090630" cy="3414674"/>
             </a:xfrm>
             <a:custGeom>
               <a:avLst/>
               <a:pathLst>
-                <a:path w="7090630" h="3415556">
+                <a:path w="7090630" h="3414674">
                   <a:moveTo>
-                    <a:pt x="3145068" y="0"/>
+                    <a:pt x="3142160" y="0"/>
                   </a:moveTo>
                   <a:lnTo>
-                    <a:pt x="3151391" y="22612"/>
-                  </a:lnTo>
-                  <a:lnTo>
-                    <a:pt x="3223013" y="261124"/>
-                  </a:lnTo>
-                  <a:lnTo>
-                    <a:pt x="3294636" y="483199"/>
-                  </a:lnTo>
-                  <a:lnTo>
-                    <a:pt x="3366258" y="689971"/>
-                  </a:lnTo>
-                  <a:lnTo>
-                    <a:pt x="3437881" y="882494"/>
-                  </a:lnTo>
-                  <a:lnTo>
-                    <a:pt x="3509503" y="1061750"/>
-                  </a:lnTo>
-                  <a:lnTo>
-                    <a:pt x="3581126" y="1228653"/>
-                  </a:lnTo>
-                  <a:lnTo>
-                    <a:pt x="3652748" y="1384055"/>
-                  </a:lnTo>
-                  <a:lnTo>
-                    <a:pt x="3724371" y="1528747"/>
-                  </a:lnTo>
-                  <a:lnTo>
-                    <a:pt x="3795993" y="1663469"/>
-                  </a:lnTo>
-                  <a:lnTo>
-                    <a:pt x="3867616" y="1788907"/>
-                  </a:lnTo>
-                  <a:lnTo>
-                    <a:pt x="3939238" y="1905701"/>
-                  </a:lnTo>
-                  <a:lnTo>
-                    <a:pt x="4010861" y="2014446"/>
-                  </a:lnTo>
-                  <a:lnTo>
-                    <a:pt x="4082483" y="2115697"/>
-                  </a:lnTo>
-                  <a:lnTo>
-                    <a:pt x="4154106" y="2209972"/>
-                  </a:lnTo>
-                  <a:lnTo>
-                    <a:pt x="4225729" y="2297749"/>
-                  </a:lnTo>
-                  <a:lnTo>
-                    <a:pt x="4297351" y="2379478"/>
-                  </a:lnTo>
-                  <a:lnTo>
-                    <a:pt x="4368974" y="2455575"/>
-                  </a:lnTo>
-                  <a:lnTo>
-                    <a:pt x="4440596" y="2526427"/>
-                  </a:lnTo>
-                  <a:lnTo>
-                    <a:pt x="4512219" y="2592398"/>
-                  </a:lnTo>
-                  <a:lnTo>
-                    <a:pt x="4583841" y="2653822"/>
-                  </a:lnTo>
-                  <a:lnTo>
-                    <a:pt x="4655464" y="2654348"/>
-                  </a:lnTo>
-                  <a:lnTo>
-                    <a:pt x="4727086" y="2654413"/>
-                  </a:lnTo>
-                  <a:lnTo>
-                    <a:pt x="4798709" y="2654478"/>
-                  </a:lnTo>
-                  <a:lnTo>
-                    <a:pt x="4870331" y="2654544"/>
-                  </a:lnTo>
-                  <a:lnTo>
-                    <a:pt x="4941954" y="2654609"/>
-                  </a:lnTo>
-                  <a:lnTo>
-                    <a:pt x="5013576" y="2654674"/>
-                  </a:lnTo>
-                  <a:lnTo>
-                    <a:pt x="5085199" y="2654740"/>
-                  </a:lnTo>
-                  <a:lnTo>
-                    <a:pt x="5156821" y="2654805"/>
-                  </a:lnTo>
-                  <a:lnTo>
-                    <a:pt x="5228444" y="2654870"/>
-                  </a:lnTo>
-                  <a:lnTo>
-                    <a:pt x="5300066" y="2654936"/>
-                  </a:lnTo>
-                  <a:lnTo>
-                    <a:pt x="5371689" y="2655001"/>
-                  </a:lnTo>
-                  <a:lnTo>
-                    <a:pt x="5443311" y="2655066"/>
-                  </a:lnTo>
-                  <a:lnTo>
-                    <a:pt x="5514934" y="2655132"/>
-                  </a:lnTo>
-                  <a:lnTo>
-                    <a:pt x="5586557" y="2655197"/>
-                  </a:lnTo>
-                  <a:lnTo>
-                    <a:pt x="5658179" y="2655262"/>
-                  </a:lnTo>
-                  <a:lnTo>
-                    <a:pt x="5729802" y="2655327"/>
-                  </a:lnTo>
-                  <a:lnTo>
-                    <a:pt x="5801424" y="2655393"/>
-                  </a:lnTo>
-                  <a:lnTo>
-                    <a:pt x="5873047" y="2655458"/>
-                  </a:lnTo>
-                  <a:lnTo>
-                    <a:pt x="5944669" y="2655523"/>
-                  </a:lnTo>
-                  <a:lnTo>
-                    <a:pt x="6016292" y="2655589"/>
-                  </a:lnTo>
-                  <a:lnTo>
-                    <a:pt x="6087914" y="2655654"/>
-                  </a:lnTo>
-                  <a:lnTo>
-                    <a:pt x="6159537" y="2655719"/>
-                  </a:lnTo>
-                  <a:lnTo>
-                    <a:pt x="6231159" y="2655784"/>
-                  </a:lnTo>
-                  <a:lnTo>
-                    <a:pt x="6302782" y="2655850"/>
-                  </a:lnTo>
-                  <a:lnTo>
-                    <a:pt x="6374404" y="2655915"/>
-                  </a:lnTo>
-                  <a:lnTo>
-                    <a:pt x="6446027" y="2655980"/>
-                  </a:lnTo>
-                  <a:lnTo>
-                    <a:pt x="6517649" y="2656045"/>
-                  </a:lnTo>
-                  <a:lnTo>
-                    <a:pt x="6589272" y="2656110"/>
-                  </a:lnTo>
-                  <a:lnTo>
-                    <a:pt x="6660894" y="2656176"/>
-                  </a:lnTo>
-                  <a:lnTo>
-                    <a:pt x="6732517" y="2656241"/>
-                  </a:lnTo>
-                  <a:lnTo>
-                    <a:pt x="6804139" y="2656306"/>
-                  </a:lnTo>
-                  <a:lnTo>
-                    <a:pt x="6875762" y="2656371"/>
-                  </a:lnTo>
-                  <a:lnTo>
-                    <a:pt x="6947385" y="2656436"/>
-                  </a:lnTo>
-                  <a:lnTo>
-                    <a:pt x="7019007" y="2656502"/>
-                  </a:lnTo>
-                  <a:lnTo>
-                    <a:pt x="7090630" y="2656567"/>
-                  </a:lnTo>
-                  <a:lnTo>
-                    <a:pt x="7090630" y="3415556"/>
-                  </a:lnTo>
-                  <a:lnTo>
-                    <a:pt x="7019007" y="3410509"/>
-                  </a:lnTo>
-                  <a:lnTo>
-                    <a:pt x="6947385" y="3405089"/>
-                  </a:lnTo>
-                  <a:lnTo>
-                    <a:pt x="6875762" y="3399267"/>
-                  </a:lnTo>
-                  <a:lnTo>
-                    <a:pt x="6804139" y="3393014"/>
-                  </a:lnTo>
-                  <a:lnTo>
-                    <a:pt x="6732517" y="3386299"/>
-                  </a:lnTo>
-                  <a:lnTo>
-                    <a:pt x="6660894" y="3379087"/>
-                  </a:lnTo>
-                  <a:lnTo>
-                    <a:pt x="6589272" y="3371341"/>
-                  </a:lnTo>
-                  <a:lnTo>
-                    <a:pt x="6517649" y="3363022"/>
-                  </a:lnTo>
-                  <a:lnTo>
-                    <a:pt x="6446027" y="3354087"/>
-                  </a:lnTo>
-                  <a:lnTo>
-                    <a:pt x="6374404" y="3344490"/>
-                  </a:lnTo>
-                  <a:lnTo>
-                    <a:pt x="6302782" y="3334184"/>
-                  </a:lnTo>
-                  <a:lnTo>
-                    <a:pt x="6231159" y="3323114"/>
-                  </a:lnTo>
-                  <a:lnTo>
-                    <a:pt x="6159537" y="3311226"/>
-                  </a:lnTo>
-                  <a:lnTo>
-                    <a:pt x="6087914" y="3298457"/>
-                  </a:lnTo>
-                  <a:lnTo>
-                    <a:pt x="6016292" y="3284744"/>
-                  </a:lnTo>
-                  <a:lnTo>
-                    <a:pt x="5944669" y="3270015"/>
-                  </a:lnTo>
-                  <a:lnTo>
-                    <a:pt x="5873047" y="3254197"/>
-                  </a:lnTo>
-                  <a:lnTo>
-                    <a:pt x="5801424" y="3237207"/>
-                  </a:lnTo>
-                  <a:lnTo>
-                    <a:pt x="5729802" y="3218960"/>
-                  </a:lnTo>
-                  <a:lnTo>
-                    <a:pt x="5658179" y="3199363"/>
-                  </a:lnTo>
-                  <a:lnTo>
-                    <a:pt x="5586557" y="3178316"/>
-                  </a:lnTo>
-                  <a:lnTo>
-                    <a:pt x="5514934" y="3155710"/>
-                  </a:lnTo>
-                  <a:lnTo>
-                    <a:pt x="5443311" y="3131432"/>
-                  </a:lnTo>
-                  <a:lnTo>
-                    <a:pt x="5371689" y="3105356"/>
-                  </a:lnTo>
-                  <a:lnTo>
-                    <a:pt x="5300066" y="3077351"/>
-                  </a:lnTo>
-                  <a:lnTo>
-                    <a:pt x="5228444" y="3047273"/>
-                  </a:lnTo>
-                  <a:lnTo>
-                    <a:pt x="5156821" y="3014969"/>
-                  </a:lnTo>
-                  <a:lnTo>
-                    <a:pt x="5085199" y="2980274"/>
-                  </a:lnTo>
-                  <a:lnTo>
-                    <a:pt x="5013576" y="2943011"/>
-                  </a:lnTo>
-                  <a:lnTo>
-                    <a:pt x="4941954" y="2902990"/>
-                  </a:lnTo>
-                  <a:lnTo>
-                    <a:pt x="4870331" y="2860008"/>
-                  </a:lnTo>
-                  <a:lnTo>
-                    <a:pt x="4798709" y="2813844"/>
-                  </a:lnTo>
-                  <a:lnTo>
-                    <a:pt x="4727086" y="2764263"/>
-                  </a:lnTo>
-                  <a:lnTo>
-                    <a:pt x="4655464" y="2711013"/>
-                  </a:lnTo>
-                  <a:lnTo>
-                    <a:pt x="4583841" y="2654282"/>
-                  </a:lnTo>
-                  <a:lnTo>
-                    <a:pt x="4512219" y="2654217"/>
-                  </a:lnTo>
-                  <a:lnTo>
-                    <a:pt x="4440596" y="2654152"/>
-                  </a:lnTo>
-                  <a:lnTo>
-                    <a:pt x="4368974" y="2654086"/>
-                  </a:lnTo>
-                  <a:lnTo>
-                    <a:pt x="4297351" y="2654021"/>
-                  </a:lnTo>
-                  <a:lnTo>
-                    <a:pt x="4225729" y="2653955"/>
-                  </a:lnTo>
-                  <a:lnTo>
-                    <a:pt x="4154106" y="2653890"/>
-                  </a:lnTo>
-                  <a:lnTo>
-                    <a:pt x="4082483" y="2653825"/>
-                  </a:lnTo>
-                  <a:lnTo>
-                    <a:pt x="4010861" y="2653759"/>
-                  </a:lnTo>
-                  <a:lnTo>
-                    <a:pt x="3939238" y="2653694"/>
-                  </a:lnTo>
-                  <a:lnTo>
-                    <a:pt x="3867616" y="2653628"/>
-                  </a:lnTo>
-                  <a:lnTo>
-                    <a:pt x="3795993" y="2653563"/>
-                  </a:lnTo>
-                  <a:lnTo>
-                    <a:pt x="3724371" y="2653498"/>
-                  </a:lnTo>
-                  <a:lnTo>
-                    <a:pt x="3652748" y="2653432"/>
-                  </a:lnTo>
-                  <a:lnTo>
-                    <a:pt x="3581126" y="2653367"/>
-                  </a:lnTo>
-                  <a:lnTo>
-                    <a:pt x="3509503" y="2653301"/>
-                  </a:lnTo>
-                  <a:lnTo>
-                    <a:pt x="3437881" y="2653236"/>
-                  </a:lnTo>
-                  <a:lnTo>
-                    <a:pt x="3366258" y="2653170"/>
-                  </a:lnTo>
-                  <a:lnTo>
-                    <a:pt x="3294636" y="2653105"/>
-                  </a:lnTo>
-                  <a:lnTo>
-                    <a:pt x="3223013" y="2653040"/>
-                  </a:lnTo>
-                  <a:lnTo>
-                    <a:pt x="3151391" y="2652974"/>
-                  </a:lnTo>
-                  <a:lnTo>
-                    <a:pt x="3079768" y="2652909"/>
-                  </a:lnTo>
-                  <a:lnTo>
-                    <a:pt x="3008146" y="2652843"/>
-                  </a:lnTo>
-                  <a:lnTo>
-                    <a:pt x="2936523" y="2652778"/>
-                  </a:lnTo>
-                  <a:lnTo>
-                    <a:pt x="2864901" y="2652712"/>
-                  </a:lnTo>
-                  <a:lnTo>
-                    <a:pt x="2793278" y="2652647"/>
-                  </a:lnTo>
-                  <a:lnTo>
-                    <a:pt x="2721655" y="2652581"/>
-                  </a:lnTo>
-                  <a:lnTo>
-                    <a:pt x="2650033" y="2652516"/>
-                  </a:lnTo>
-                  <a:lnTo>
-                    <a:pt x="2578410" y="2652450"/>
-                  </a:lnTo>
-                  <a:lnTo>
-                    <a:pt x="2506788" y="2652385"/>
-                  </a:lnTo>
-                  <a:lnTo>
-                    <a:pt x="2435165" y="2652319"/>
-                  </a:lnTo>
-                  <a:lnTo>
-                    <a:pt x="2363543" y="2652254"/>
-                  </a:lnTo>
-                  <a:lnTo>
-                    <a:pt x="2291920" y="2652188"/>
-                  </a:lnTo>
-                  <a:lnTo>
-                    <a:pt x="2220298" y="2652123"/>
-                  </a:lnTo>
-                  <a:lnTo>
-                    <a:pt x="2148675" y="2652057"/>
-                  </a:lnTo>
-                  <a:lnTo>
-                    <a:pt x="2077053" y="2651992"/>
-                  </a:lnTo>
-                  <a:lnTo>
-                    <a:pt x="2005430" y="2651926"/>
-                  </a:lnTo>
-                  <a:lnTo>
-                    <a:pt x="1933808" y="2651860"/>
-                  </a:lnTo>
-                  <a:lnTo>
-                    <a:pt x="1862185" y="2651795"/>
-                  </a:lnTo>
-                  <a:lnTo>
-                    <a:pt x="1790563" y="2651729"/>
-                  </a:lnTo>
-                  <a:lnTo>
-                    <a:pt x="1718940" y="2651664"/>
-                  </a:lnTo>
-                  <a:lnTo>
-                    <a:pt x="1647318" y="2651598"/>
-                  </a:lnTo>
-                  <a:lnTo>
-                    <a:pt x="1575695" y="2651533"/>
-                  </a:lnTo>
-                  <a:lnTo>
-                    <a:pt x="1504073" y="2651467"/>
-                  </a:lnTo>
-                  <a:lnTo>
-                    <a:pt x="1432450" y="2651401"/>
-                  </a:lnTo>
-                  <a:lnTo>
-                    <a:pt x="1360827" y="2651336"/>
-                  </a:lnTo>
-                  <a:lnTo>
-                    <a:pt x="1289205" y="2651270"/>
-                  </a:lnTo>
-                  <a:lnTo>
-                    <a:pt x="1217582" y="2651205"/>
-                  </a:lnTo>
-                  <a:lnTo>
-                    <a:pt x="1145960" y="2651139"/>
-                  </a:lnTo>
-                  <a:lnTo>
-                    <a:pt x="1074337" y="2651073"/>
-                  </a:lnTo>
-                  <a:lnTo>
-                    <a:pt x="1002715" y="2651008"/>
-                  </a:lnTo>
-                  <a:lnTo>
-                    <a:pt x="931092" y="2650942"/>
-                  </a:lnTo>
-                  <a:lnTo>
-                    <a:pt x="859470" y="2650877"/>
-                  </a:lnTo>
-                  <a:lnTo>
-                    <a:pt x="787847" y="2650811"/>
-                  </a:lnTo>
-                  <a:lnTo>
-                    <a:pt x="716225" y="2650745"/>
-                  </a:lnTo>
-                  <a:lnTo>
-                    <a:pt x="644602" y="2650680"/>
-                  </a:lnTo>
-                  <a:lnTo>
-                    <a:pt x="572980" y="2650614"/>
-                  </a:lnTo>
-                  <a:lnTo>
-                    <a:pt x="501357" y="2650548"/>
-                  </a:lnTo>
-                  <a:lnTo>
-                    <a:pt x="429735" y="2650483"/>
-                  </a:lnTo>
-                  <a:lnTo>
-                    <a:pt x="358112" y="2650417"/>
-                  </a:lnTo>
-                  <a:lnTo>
-                    <a:pt x="286490" y="2650351"/>
-                  </a:lnTo>
-                  <a:lnTo>
-                    <a:pt x="214867" y="2650286"/>
-                  </a:lnTo>
-                  <a:lnTo>
-                    <a:pt x="143245" y="2650220"/>
-                  </a:lnTo>
-                  <a:lnTo>
-                    <a:pt x="71622" y="2650154"/>
-                  </a:lnTo>
-                  <a:lnTo>
-                    <a:pt x="0" y="2650089"/>
+                    <a:pt x="3151391" y="32778"/>
+                  </a:lnTo>
+                  <a:lnTo>
+                    <a:pt x="3223013" y="269667"/>
+                  </a:lnTo>
+                  <a:lnTo>
+                    <a:pt x="3294636" y="490294"/>
+                  </a:lnTo>
+                  <a:lnTo>
+                    <a:pt x="3366258" y="695777"/>
+                  </a:lnTo>
+                  <a:lnTo>
+                    <a:pt x="3437881" y="887154"/>
+                  </a:lnTo>
+                  <a:lnTo>
+                    <a:pt x="3509503" y="1065395"/>
+                  </a:lnTo>
+                  <a:lnTo>
+                    <a:pt x="3581126" y="1231400"/>
+                  </a:lnTo>
+                  <a:lnTo>
+                    <a:pt x="3652748" y="1386011"/>
+                  </a:lnTo>
+                  <a:lnTo>
+                    <a:pt x="3724371" y="1530008"/>
+                  </a:lnTo>
+                  <a:lnTo>
+                    <a:pt x="3795993" y="1664120"/>
+                  </a:lnTo>
+                  <a:lnTo>
+                    <a:pt x="3867616" y="1789027"/>
+                  </a:lnTo>
+                  <a:lnTo>
+                    <a:pt x="3939238" y="1905359"/>
+                  </a:lnTo>
+                  <a:lnTo>
+                    <a:pt x="4010861" y="2013706"/>
+                  </a:lnTo>
+                  <a:lnTo>
+                    <a:pt x="4082483" y="2114615"/>
+                  </a:lnTo>
+                  <a:lnTo>
+                    <a:pt x="4154106" y="2208598"/>
+                  </a:lnTo>
+                  <a:lnTo>
+                    <a:pt x="4225729" y="2296129"/>
+                  </a:lnTo>
+                  <a:lnTo>
+                    <a:pt x="4297351" y="2377652"/>
+                  </a:lnTo>
+                  <a:lnTo>
+                    <a:pt x="4368974" y="2453579"/>
+                  </a:lnTo>
+                  <a:lnTo>
+                    <a:pt x="4440596" y="2524294"/>
+                  </a:lnTo>
+                  <a:lnTo>
+                    <a:pt x="4512219" y="2590155"/>
+                  </a:lnTo>
+                  <a:lnTo>
+                    <a:pt x="4583841" y="2651494"/>
+                  </a:lnTo>
+                  <a:lnTo>
+                    <a:pt x="4655464" y="2653588"/>
+                  </a:lnTo>
+                  <a:lnTo>
+                    <a:pt x="4727086" y="2652858"/>
+                  </a:lnTo>
+                  <a:lnTo>
+                    <a:pt x="4798709" y="2652128"/>
+                  </a:lnTo>
+                  <a:lnTo>
+                    <a:pt x="4870331" y="2651397"/>
+                  </a:lnTo>
+                  <a:lnTo>
+                    <a:pt x="4941954" y="2650665"/>
+                  </a:lnTo>
+                  <a:lnTo>
+                    <a:pt x="5013576" y="2649933"/>
+                  </a:lnTo>
+                  <a:lnTo>
+                    <a:pt x="5085199" y="2649200"/>
+                  </a:lnTo>
+                  <a:lnTo>
+                    <a:pt x="5156821" y="2648467"/>
+                  </a:lnTo>
+                  <a:lnTo>
+                    <a:pt x="5228444" y="2647732"/>
+                  </a:lnTo>
+                  <a:lnTo>
+                    <a:pt x="5300066" y="2646997"/>
+                  </a:lnTo>
+                  <a:lnTo>
+                    <a:pt x="5371689" y="2646262"/>
+                  </a:lnTo>
+                  <a:lnTo>
+                    <a:pt x="5443311" y="2645526"/>
+                  </a:lnTo>
+                  <a:lnTo>
+                    <a:pt x="5514934" y="2644789"/>
+                  </a:lnTo>
+                  <a:lnTo>
+                    <a:pt x="5586557" y="2644052"/>
+                  </a:lnTo>
+                  <a:lnTo>
+                    <a:pt x="5658179" y="2643313"/>
+                  </a:lnTo>
+                  <a:lnTo>
+                    <a:pt x="5729802" y="2642575"/>
+                  </a:lnTo>
+                  <a:lnTo>
+                    <a:pt x="5801424" y="2641835"/>
+                  </a:lnTo>
+                  <a:lnTo>
+                    <a:pt x="5873047" y="2641095"/>
+                  </a:lnTo>
+                  <a:lnTo>
+                    <a:pt x="5944669" y="2640354"/>
+                  </a:lnTo>
+                  <a:lnTo>
+                    <a:pt x="6016292" y="2639613"/>
+                  </a:lnTo>
+                  <a:lnTo>
+                    <a:pt x="6087914" y="2638871"/>
+                  </a:lnTo>
+                  <a:lnTo>
+                    <a:pt x="6159537" y="2638128"/>
+                  </a:lnTo>
+                  <a:lnTo>
+                    <a:pt x="6231159" y="2637385"/>
+                  </a:lnTo>
+                  <a:lnTo>
+                    <a:pt x="6302782" y="2636641"/>
+                  </a:lnTo>
+                  <a:lnTo>
+                    <a:pt x="6374404" y="2635897"/>
+                  </a:lnTo>
+                  <a:lnTo>
+                    <a:pt x="6446027" y="2635151"/>
+                  </a:lnTo>
+                  <a:lnTo>
+                    <a:pt x="6517649" y="2634405"/>
+                  </a:lnTo>
+                  <a:lnTo>
+                    <a:pt x="6589272" y="2633659"/>
+                  </a:lnTo>
+                  <a:lnTo>
+                    <a:pt x="6660894" y="2632912"/>
+                  </a:lnTo>
+                  <a:lnTo>
+                    <a:pt x="6732517" y="2632164"/>
+                  </a:lnTo>
+                  <a:lnTo>
+                    <a:pt x="6804139" y="2631415"/>
+                  </a:lnTo>
+                  <a:lnTo>
+                    <a:pt x="6875762" y="2630666"/>
+                  </a:lnTo>
+                  <a:lnTo>
+                    <a:pt x="6947385" y="2629916"/>
+                  </a:lnTo>
+                  <a:lnTo>
+                    <a:pt x="7019007" y="2629165"/>
+                  </a:lnTo>
+                  <a:lnTo>
+                    <a:pt x="7090630" y="2628414"/>
+                  </a:lnTo>
+                  <a:lnTo>
+                    <a:pt x="7090630" y="3414674"/>
+                  </a:lnTo>
+                  <a:lnTo>
+                    <a:pt x="7019007" y="3409583"/>
+                  </a:lnTo>
+                  <a:lnTo>
+                    <a:pt x="6947385" y="3404117"/>
+                  </a:lnTo>
+                  <a:lnTo>
+                    <a:pt x="6875762" y="3398248"/>
+                  </a:lnTo>
+                  <a:lnTo>
+                    <a:pt x="6804139" y="3391947"/>
+                  </a:lnTo>
+                  <a:lnTo>
+                    <a:pt x="6732517" y="3385181"/>
+                  </a:lnTo>
+                  <a:lnTo>
+                    <a:pt x="6660894" y="3377916"/>
+                  </a:lnTo>
+                  <a:lnTo>
+                    <a:pt x="6589272" y="3370116"/>
+                  </a:lnTo>
+                  <a:lnTo>
+                    <a:pt x="6517649" y="3361741"/>
+                  </a:lnTo>
+                  <a:lnTo>
+                    <a:pt x="6446027" y="3352749"/>
+                  </a:lnTo>
+                  <a:lnTo>
+                    <a:pt x="6374404" y="3343094"/>
+                  </a:lnTo>
+                  <a:lnTo>
+                    <a:pt x="6302782" y="3332727"/>
+                  </a:lnTo>
+                  <a:lnTo>
+                    <a:pt x="6231159" y="3321597"/>
+                  </a:lnTo>
+                  <a:lnTo>
+                    <a:pt x="6159537" y="3309646"/>
+                  </a:lnTo>
+                  <a:lnTo>
+                    <a:pt x="6087914" y="3296814"/>
+                  </a:lnTo>
+                  <a:lnTo>
+                    <a:pt x="6016292" y="3283036"/>
+                  </a:lnTo>
+                  <a:lnTo>
+                    <a:pt x="5944669" y="3268244"/>
+                  </a:lnTo>
+                  <a:lnTo>
+                    <a:pt x="5873047" y="3252360"/>
+                  </a:lnTo>
+                  <a:lnTo>
+                    <a:pt x="5801424" y="3235306"/>
+                  </a:lnTo>
+                  <a:lnTo>
+                    <a:pt x="5729802" y="3216995"/>
+                  </a:lnTo>
+                  <a:lnTo>
+                    <a:pt x="5658179" y="3197335"/>
+                  </a:lnTo>
+                  <a:lnTo>
+                    <a:pt x="5586557" y="3176226"/>
+                  </a:lnTo>
+                  <a:lnTo>
+                    <a:pt x="5514934" y="3153560"/>
+                  </a:lnTo>
+                  <a:lnTo>
+                    <a:pt x="5443311" y="3129224"/>
+                  </a:lnTo>
+                  <a:lnTo>
+                    <a:pt x="5371689" y="3103095"/>
+                  </a:lnTo>
+                  <a:lnTo>
+                    <a:pt x="5300066" y="3075040"/>
+                  </a:lnTo>
+                  <a:lnTo>
+                    <a:pt x="5228444" y="3044917"/>
+                  </a:lnTo>
+                  <a:lnTo>
+                    <a:pt x="5156821" y="3012573"/>
+                  </a:lnTo>
+                  <a:lnTo>
+                    <a:pt x="5085199" y="2977846"/>
+                  </a:lnTo>
+                  <a:lnTo>
+                    <a:pt x="5013576" y="2940560"/>
+                  </a:lnTo>
+                  <a:lnTo>
+                    <a:pt x="4941954" y="2900525"/>
+                  </a:lnTo>
+                  <a:lnTo>
+                    <a:pt x="4870331" y="2857540"/>
+                  </a:lnTo>
+                  <a:lnTo>
+                    <a:pt x="4798709" y="2811386"/>
+                  </a:lnTo>
+                  <a:lnTo>
+                    <a:pt x="4727086" y="2761831"/>
+                  </a:lnTo>
+                  <a:lnTo>
+                    <a:pt x="4655464" y="2708624"/>
+                  </a:lnTo>
+                  <a:lnTo>
+                    <a:pt x="4583841" y="2654317"/>
+                  </a:lnTo>
+                  <a:lnTo>
+                    <a:pt x="4512219" y="2655046"/>
+                  </a:lnTo>
+                  <a:lnTo>
+                    <a:pt x="4440596" y="2655774"/>
+                  </a:lnTo>
+                  <a:lnTo>
+                    <a:pt x="4368974" y="2656501"/>
+                  </a:lnTo>
+                  <a:lnTo>
+                    <a:pt x="4297351" y="2657227"/>
+                  </a:lnTo>
+                  <a:lnTo>
+                    <a:pt x="4225729" y="2657953"/>
+                  </a:lnTo>
+                  <a:lnTo>
+                    <a:pt x="4154106" y="2658678"/>
+                  </a:lnTo>
+                  <a:lnTo>
+                    <a:pt x="4082483" y="2659403"/>
+                  </a:lnTo>
+                  <a:lnTo>
+                    <a:pt x="4010861" y="2660127"/>
+                  </a:lnTo>
+                  <a:lnTo>
+                    <a:pt x="3939238" y="2660850"/>
+                  </a:lnTo>
+                  <a:lnTo>
+                    <a:pt x="3867616" y="2661573"/>
+                  </a:lnTo>
+                  <a:lnTo>
+                    <a:pt x="3795993" y="2662295"/>
+                  </a:lnTo>
+                  <a:lnTo>
+                    <a:pt x="3724371" y="2663016"/>
+                  </a:lnTo>
+                  <a:lnTo>
+                    <a:pt x="3652748" y="2663737"/>
+                  </a:lnTo>
+                  <a:lnTo>
+                    <a:pt x="3581126" y="2664457"/>
+                  </a:lnTo>
+                  <a:lnTo>
+                    <a:pt x="3509503" y="2665177"/>
+                  </a:lnTo>
+                  <a:lnTo>
+                    <a:pt x="3437881" y="2665896"/>
+                  </a:lnTo>
+                  <a:lnTo>
+                    <a:pt x="3366258" y="2666614"/>
+                  </a:lnTo>
+                  <a:lnTo>
+                    <a:pt x="3294636" y="2667332"/>
+                  </a:lnTo>
+                  <a:lnTo>
+                    <a:pt x="3223013" y="2668049"/>
+                  </a:lnTo>
+                  <a:lnTo>
+                    <a:pt x="3151391" y="2668765"/>
+                  </a:lnTo>
+                  <a:lnTo>
+                    <a:pt x="3079768" y="2669481"/>
+                  </a:lnTo>
+                  <a:lnTo>
+                    <a:pt x="3008146" y="2670196"/>
+                  </a:lnTo>
+                  <a:lnTo>
+                    <a:pt x="2936523" y="2670911"/>
+                  </a:lnTo>
+                  <a:lnTo>
+                    <a:pt x="2864901" y="2671624"/>
+                  </a:lnTo>
+                  <a:lnTo>
+                    <a:pt x="2793278" y="2672338"/>
+                  </a:lnTo>
+                  <a:lnTo>
+                    <a:pt x="2721655" y="2673050"/>
+                  </a:lnTo>
+                  <a:lnTo>
+                    <a:pt x="2650033" y="2673762"/>
+                  </a:lnTo>
+                  <a:lnTo>
+                    <a:pt x="2578410" y="2674474"/>
+                  </a:lnTo>
+                  <a:lnTo>
+                    <a:pt x="2506788" y="2675184"/>
+                  </a:lnTo>
+                  <a:lnTo>
+                    <a:pt x="2435165" y="2675895"/>
+                  </a:lnTo>
+                  <a:lnTo>
+                    <a:pt x="2363543" y="2676604"/>
+                  </a:lnTo>
+                  <a:lnTo>
+                    <a:pt x="2291920" y="2677313"/>
+                  </a:lnTo>
+                  <a:lnTo>
+                    <a:pt x="2220298" y="2678021"/>
+                  </a:lnTo>
+                  <a:lnTo>
+                    <a:pt x="2148675" y="2678729"/>
+                  </a:lnTo>
+                  <a:lnTo>
+                    <a:pt x="2077053" y="2679436"/>
+                  </a:lnTo>
+                  <a:lnTo>
+                    <a:pt x="2005430" y="2680142"/>
+                  </a:lnTo>
+                  <a:lnTo>
+                    <a:pt x="1933808" y="2680848"/>
+                  </a:lnTo>
+                  <a:lnTo>
+                    <a:pt x="1862185" y="2681553"/>
+                  </a:lnTo>
+                  <a:lnTo>
+                    <a:pt x="1790563" y="2682258"/>
+                  </a:lnTo>
+                  <a:lnTo>
+                    <a:pt x="1718940" y="2682962"/>
+                  </a:lnTo>
+                  <a:lnTo>
+                    <a:pt x="1647318" y="2683665"/>
+                  </a:lnTo>
+                  <a:lnTo>
+                    <a:pt x="1575695" y="2684368"/>
+                  </a:lnTo>
+                  <a:lnTo>
+                    <a:pt x="1504073" y="2685070"/>
+                  </a:lnTo>
+                  <a:lnTo>
+                    <a:pt x="1432450" y="2685771"/>
+                  </a:lnTo>
+                  <a:lnTo>
+                    <a:pt x="1360827" y="2686472"/>
+                  </a:lnTo>
+                  <a:lnTo>
+                    <a:pt x="1289205" y="2687172"/>
+                  </a:lnTo>
+                  <a:lnTo>
+                    <a:pt x="1217582" y="2687872"/>
+                  </a:lnTo>
+                  <a:lnTo>
+                    <a:pt x="1145960" y="2688571"/>
+                  </a:lnTo>
+                  <a:lnTo>
+                    <a:pt x="1074337" y="2689269"/>
+                  </a:lnTo>
+                  <a:lnTo>
+                    <a:pt x="1002715" y="2689967"/>
+                  </a:lnTo>
+                  <a:lnTo>
+                    <a:pt x="931092" y="2690664"/>
+                  </a:lnTo>
+                  <a:lnTo>
+                    <a:pt x="859470" y="2691360"/>
+                  </a:lnTo>
+                  <a:lnTo>
+                    <a:pt x="787847" y="2692056"/>
+                  </a:lnTo>
+                  <a:lnTo>
+                    <a:pt x="716225" y="2692752"/>
+                  </a:lnTo>
+                  <a:lnTo>
+                    <a:pt x="644602" y="2693446"/>
+                  </a:lnTo>
+                  <a:lnTo>
+                    <a:pt x="572980" y="2694140"/>
+                  </a:lnTo>
+                  <a:lnTo>
+                    <a:pt x="501357" y="2694834"/>
+                  </a:lnTo>
+                  <a:lnTo>
+                    <a:pt x="429735" y="2695527"/>
+                  </a:lnTo>
+                  <a:lnTo>
+                    <a:pt x="358112" y="2696219"/>
+                  </a:lnTo>
+                  <a:lnTo>
+                    <a:pt x="286490" y="2696911"/>
+                  </a:lnTo>
+                  <a:lnTo>
+                    <a:pt x="214867" y="2697602"/>
+                  </a:lnTo>
+                  <a:lnTo>
+                    <a:pt x="143245" y="2698292"/>
+                  </a:lnTo>
+                  <a:lnTo>
+                    <a:pt x="71622" y="2698982"/>
+                  </a:lnTo>
+                  <a:lnTo>
+                    <a:pt x="0" y="2699671"/>
                   </a:lnTo>
                   <a:lnTo>
                     <a:pt x="0" y="0"/>
@@ -3421,183 +3421,183 @@
           </p:nvSpPr>
           <p:spPr>
             <a:xfrm>
-              <a:off x="4317118" y="2073503"/>
-              <a:ext cx="3945561" cy="2656567"/>
+              <a:off x="4314210" y="2073503"/>
+              <a:ext cx="3948469" cy="2653588"/>
             </a:xfrm>
             <a:custGeom>
               <a:avLst/>
               <a:pathLst>
-                <a:path w="3945561" h="2656567">
+                <a:path w="3948469" h="2653588">
                   <a:moveTo>
                     <a:pt x="0" y="0"/>
                   </a:moveTo>
                   <a:lnTo>
-                    <a:pt x="6322" y="22612"/>
-                  </a:lnTo>
-                  <a:lnTo>
-                    <a:pt x="77944" y="261124"/>
-                  </a:lnTo>
-                  <a:lnTo>
-                    <a:pt x="149567" y="483199"/>
-                  </a:lnTo>
-                  <a:lnTo>
-                    <a:pt x="221189" y="689971"/>
-                  </a:lnTo>
-                  <a:lnTo>
-                    <a:pt x="292812" y="882494"/>
-                  </a:lnTo>
-                  <a:lnTo>
-                    <a:pt x="364435" y="1061750"/>
-                  </a:lnTo>
-                  <a:lnTo>
-                    <a:pt x="436057" y="1228653"/>
-                  </a:lnTo>
-                  <a:lnTo>
-                    <a:pt x="507680" y="1384055"/>
-                  </a:lnTo>
-                  <a:lnTo>
-                    <a:pt x="579302" y="1528747"/>
-                  </a:lnTo>
-                  <a:lnTo>
-                    <a:pt x="650925" y="1663469"/>
-                  </a:lnTo>
-                  <a:lnTo>
-                    <a:pt x="722547" y="1788907"/>
-                  </a:lnTo>
-                  <a:lnTo>
-                    <a:pt x="794170" y="1905701"/>
-                  </a:lnTo>
-                  <a:lnTo>
-                    <a:pt x="865792" y="2014446"/>
-                  </a:lnTo>
-                  <a:lnTo>
-                    <a:pt x="937415" y="2115697"/>
-                  </a:lnTo>
-                  <a:lnTo>
-                    <a:pt x="1009037" y="2209972"/>
-                  </a:lnTo>
-                  <a:lnTo>
-                    <a:pt x="1080660" y="2297749"/>
-                  </a:lnTo>
-                  <a:lnTo>
-                    <a:pt x="1152282" y="2379478"/>
-                  </a:lnTo>
-                  <a:lnTo>
-                    <a:pt x="1223905" y="2455575"/>
-                  </a:lnTo>
-                  <a:lnTo>
-                    <a:pt x="1295527" y="2526427"/>
-                  </a:lnTo>
-                  <a:lnTo>
-                    <a:pt x="1367150" y="2592398"/>
-                  </a:lnTo>
-                  <a:lnTo>
-                    <a:pt x="1438772" y="2653822"/>
-                  </a:lnTo>
-                  <a:lnTo>
-                    <a:pt x="1510395" y="2654348"/>
-                  </a:lnTo>
-                  <a:lnTo>
-                    <a:pt x="1582017" y="2654413"/>
-                  </a:lnTo>
-                  <a:lnTo>
-                    <a:pt x="1653640" y="2654478"/>
-                  </a:lnTo>
-                  <a:lnTo>
-                    <a:pt x="1725263" y="2654544"/>
-                  </a:lnTo>
-                  <a:lnTo>
-                    <a:pt x="1796885" y="2654609"/>
-                  </a:lnTo>
-                  <a:lnTo>
-                    <a:pt x="1868508" y="2654674"/>
-                  </a:lnTo>
-                  <a:lnTo>
-                    <a:pt x="1940130" y="2654740"/>
-                  </a:lnTo>
-                  <a:lnTo>
-                    <a:pt x="2011753" y="2654805"/>
-                  </a:lnTo>
-                  <a:lnTo>
-                    <a:pt x="2083375" y="2654870"/>
-                  </a:lnTo>
-                  <a:lnTo>
-                    <a:pt x="2154998" y="2654936"/>
-                  </a:lnTo>
-                  <a:lnTo>
-                    <a:pt x="2226620" y="2655001"/>
-                  </a:lnTo>
-                  <a:lnTo>
-                    <a:pt x="2298243" y="2655066"/>
-                  </a:lnTo>
-                  <a:lnTo>
-                    <a:pt x="2369865" y="2655132"/>
-                  </a:lnTo>
-                  <a:lnTo>
-                    <a:pt x="2441488" y="2655197"/>
-                  </a:lnTo>
-                  <a:lnTo>
-                    <a:pt x="2513110" y="2655262"/>
-                  </a:lnTo>
-                  <a:lnTo>
-                    <a:pt x="2584733" y="2655327"/>
-                  </a:lnTo>
-                  <a:lnTo>
-                    <a:pt x="2656355" y="2655393"/>
-                  </a:lnTo>
-                  <a:lnTo>
-                    <a:pt x="2727978" y="2655458"/>
-                  </a:lnTo>
-                  <a:lnTo>
-                    <a:pt x="2799600" y="2655523"/>
-                  </a:lnTo>
-                  <a:lnTo>
-                    <a:pt x="2871223" y="2655589"/>
-                  </a:lnTo>
-                  <a:lnTo>
-                    <a:pt x="2942845" y="2655654"/>
-                  </a:lnTo>
-                  <a:lnTo>
-                    <a:pt x="3014468" y="2655719"/>
-                  </a:lnTo>
-                  <a:lnTo>
-                    <a:pt x="3086090" y="2655784"/>
-                  </a:lnTo>
-                  <a:lnTo>
-                    <a:pt x="3157713" y="2655850"/>
-                  </a:lnTo>
-                  <a:lnTo>
-                    <a:pt x="3229336" y="2655915"/>
-                  </a:lnTo>
-                  <a:lnTo>
-                    <a:pt x="3300958" y="2655980"/>
-                  </a:lnTo>
-                  <a:lnTo>
-                    <a:pt x="3372581" y="2656045"/>
-                  </a:lnTo>
-                  <a:lnTo>
-                    <a:pt x="3444203" y="2656110"/>
-                  </a:lnTo>
-                  <a:lnTo>
-                    <a:pt x="3515826" y="2656176"/>
-                  </a:lnTo>
-                  <a:lnTo>
-                    <a:pt x="3587448" y="2656241"/>
-                  </a:lnTo>
-                  <a:lnTo>
-                    <a:pt x="3659071" y="2656306"/>
-                  </a:lnTo>
-                  <a:lnTo>
-                    <a:pt x="3730693" y="2656371"/>
-                  </a:lnTo>
-                  <a:lnTo>
-                    <a:pt x="3802316" y="2656436"/>
-                  </a:lnTo>
-                  <a:lnTo>
-                    <a:pt x="3873938" y="2656502"/>
-                  </a:lnTo>
-                  <a:lnTo>
-                    <a:pt x="3945561" y="2656567"/>
+                    <a:pt x="9230" y="32778"/>
+                  </a:lnTo>
+                  <a:lnTo>
+                    <a:pt x="80852" y="269667"/>
+                  </a:lnTo>
+                  <a:lnTo>
+                    <a:pt x="152475" y="490294"/>
+                  </a:lnTo>
+                  <a:lnTo>
+                    <a:pt x="224097" y="695777"/>
+                  </a:lnTo>
+                  <a:lnTo>
+                    <a:pt x="295720" y="887154"/>
+                  </a:lnTo>
+                  <a:lnTo>
+                    <a:pt x="367342" y="1065395"/>
+                  </a:lnTo>
+                  <a:lnTo>
+                    <a:pt x="438965" y="1231400"/>
+                  </a:lnTo>
+                  <a:lnTo>
+                    <a:pt x="510588" y="1386011"/>
+                  </a:lnTo>
+                  <a:lnTo>
+                    <a:pt x="582210" y="1530008"/>
+                  </a:lnTo>
+                  <a:lnTo>
+                    <a:pt x="653833" y="1664120"/>
+                  </a:lnTo>
+                  <a:lnTo>
+                    <a:pt x="725455" y="1789027"/>
+                  </a:lnTo>
+                  <a:lnTo>
+                    <a:pt x="797078" y="1905359"/>
+                  </a:lnTo>
+                  <a:lnTo>
+                    <a:pt x="868700" y="2013706"/>
+                  </a:lnTo>
+                  <a:lnTo>
+                    <a:pt x="940323" y="2114615"/>
+                  </a:lnTo>
+                  <a:lnTo>
+                    <a:pt x="1011945" y="2208598"/>
+                  </a:lnTo>
+                  <a:lnTo>
+                    <a:pt x="1083568" y="2296129"/>
+                  </a:lnTo>
+                  <a:lnTo>
+                    <a:pt x="1155190" y="2377652"/>
+                  </a:lnTo>
+                  <a:lnTo>
+                    <a:pt x="1226813" y="2453579"/>
+                  </a:lnTo>
+                  <a:lnTo>
+                    <a:pt x="1298435" y="2524294"/>
+                  </a:lnTo>
+                  <a:lnTo>
+                    <a:pt x="1370058" y="2590155"/>
+                  </a:lnTo>
+                  <a:lnTo>
+                    <a:pt x="1441680" y="2651494"/>
+                  </a:lnTo>
+                  <a:lnTo>
+                    <a:pt x="1513303" y="2653588"/>
+                  </a:lnTo>
+                  <a:lnTo>
+                    <a:pt x="1584925" y="2652858"/>
+                  </a:lnTo>
+                  <a:lnTo>
+                    <a:pt x="1656548" y="2652128"/>
+                  </a:lnTo>
+                  <a:lnTo>
+                    <a:pt x="1728170" y="2651397"/>
+                  </a:lnTo>
+                  <a:lnTo>
+                    <a:pt x="1799793" y="2650665"/>
+                  </a:lnTo>
+                  <a:lnTo>
+                    <a:pt x="1871416" y="2649933"/>
+                  </a:lnTo>
+                  <a:lnTo>
+                    <a:pt x="1943038" y="2649200"/>
+                  </a:lnTo>
+                  <a:lnTo>
+                    <a:pt x="2014661" y="2648467"/>
+                  </a:lnTo>
+                  <a:lnTo>
+                    <a:pt x="2086283" y="2647732"/>
+                  </a:lnTo>
+                  <a:lnTo>
+                    <a:pt x="2157906" y="2646997"/>
+                  </a:lnTo>
+                  <a:lnTo>
+                    <a:pt x="2229528" y="2646262"/>
+                  </a:lnTo>
+                  <a:lnTo>
+                    <a:pt x="2301151" y="2645526"/>
+                  </a:lnTo>
+                  <a:lnTo>
+                    <a:pt x="2372773" y="2644789"/>
+                  </a:lnTo>
+                  <a:lnTo>
+                    <a:pt x="2444396" y="2644052"/>
+                  </a:lnTo>
+                  <a:lnTo>
+                    <a:pt x="2516018" y="2643313"/>
+                  </a:lnTo>
+                  <a:lnTo>
+                    <a:pt x="2587641" y="2642575"/>
+                  </a:lnTo>
+                  <a:lnTo>
+                    <a:pt x="2659263" y="2641835"/>
+                  </a:lnTo>
+                  <a:lnTo>
+                    <a:pt x="2730886" y="2641095"/>
+                  </a:lnTo>
+                  <a:lnTo>
+                    <a:pt x="2802508" y="2640354"/>
+                  </a:lnTo>
+                  <a:lnTo>
+                    <a:pt x="2874131" y="2639613"/>
+                  </a:lnTo>
+                  <a:lnTo>
+                    <a:pt x="2945753" y="2638871"/>
+                  </a:lnTo>
+                  <a:lnTo>
+                    <a:pt x="3017376" y="2638128"/>
+                  </a:lnTo>
+                  <a:lnTo>
+                    <a:pt x="3088998" y="2637385"/>
+                  </a:lnTo>
+                  <a:lnTo>
+                    <a:pt x="3160621" y="2636641"/>
+                  </a:lnTo>
+                  <a:lnTo>
+                    <a:pt x="3232243" y="2635897"/>
+                  </a:lnTo>
+                  <a:lnTo>
+                    <a:pt x="3303866" y="2635151"/>
+                  </a:lnTo>
+                  <a:lnTo>
+                    <a:pt x="3375489" y="2634405"/>
+                  </a:lnTo>
+                  <a:lnTo>
+                    <a:pt x="3447111" y="2633659"/>
+                  </a:lnTo>
+                  <a:lnTo>
+                    <a:pt x="3518734" y="2632912"/>
+                  </a:lnTo>
+                  <a:lnTo>
+                    <a:pt x="3590356" y="2632164"/>
+                  </a:lnTo>
+                  <a:lnTo>
+                    <a:pt x="3661979" y="2631415"/>
+                  </a:lnTo>
+                  <a:lnTo>
+                    <a:pt x="3733601" y="2630666"/>
+                  </a:lnTo>
+                  <a:lnTo>
+                    <a:pt x="3805224" y="2629916"/>
+                  </a:lnTo>
+                  <a:lnTo>
+                    <a:pt x="3876846" y="2629165"/>
+                  </a:lnTo>
+                  <a:lnTo>
+                    <a:pt x="3948469" y="2628414"/>
                   </a:lnTo>
                 </a:path>
               </a:pathLst>
@@ -3617,312 +3617,312 @@
           </p:nvSpPr>
           <p:spPr>
             <a:xfrm>
-              <a:off x="1172049" y="4723592"/>
-              <a:ext cx="7090630" cy="765467"/>
+              <a:off x="1172049" y="4727820"/>
+              <a:ext cx="7090630" cy="760356"/>
             </a:xfrm>
             <a:custGeom>
               <a:avLst/>
               <a:pathLst>
-                <a:path w="7090630" h="765467">
+                <a:path w="7090630" h="760356">
                   <a:moveTo>
-                    <a:pt x="7090630" y="765467"/>
+                    <a:pt x="7090630" y="760356"/>
                   </a:moveTo>
                   <a:lnTo>
-                    <a:pt x="7019007" y="760420"/>
-                  </a:lnTo>
-                  <a:lnTo>
-                    <a:pt x="6947385" y="754999"/>
-                  </a:lnTo>
-                  <a:lnTo>
-                    <a:pt x="6875762" y="749178"/>
-                  </a:lnTo>
-                  <a:lnTo>
-                    <a:pt x="6804139" y="742925"/>
-                  </a:lnTo>
-                  <a:lnTo>
-                    <a:pt x="6732517" y="736210"/>
-                  </a:lnTo>
-                  <a:lnTo>
-                    <a:pt x="6660894" y="728998"/>
-                  </a:lnTo>
-                  <a:lnTo>
-                    <a:pt x="6589272" y="721252"/>
-                  </a:lnTo>
-                  <a:lnTo>
-                    <a:pt x="6517649" y="712933"/>
-                  </a:lnTo>
-                  <a:lnTo>
-                    <a:pt x="6446027" y="703998"/>
-                  </a:lnTo>
-                  <a:lnTo>
-                    <a:pt x="6374404" y="694401"/>
-                  </a:lnTo>
-                  <a:lnTo>
-                    <a:pt x="6302782" y="684095"/>
-                  </a:lnTo>
-                  <a:lnTo>
-                    <a:pt x="6231159" y="673025"/>
-                  </a:lnTo>
-                  <a:lnTo>
-                    <a:pt x="6159537" y="661137"/>
-                  </a:lnTo>
-                  <a:lnTo>
-                    <a:pt x="6087914" y="648368"/>
-                  </a:lnTo>
-                  <a:lnTo>
-                    <a:pt x="6016292" y="634655"/>
-                  </a:lnTo>
-                  <a:lnTo>
-                    <a:pt x="5944669" y="619926"/>
-                  </a:lnTo>
-                  <a:lnTo>
-                    <a:pt x="5873047" y="604107"/>
-                  </a:lnTo>
-                  <a:lnTo>
-                    <a:pt x="5801424" y="587118"/>
-                  </a:lnTo>
-                  <a:lnTo>
-                    <a:pt x="5729802" y="568871"/>
-                  </a:lnTo>
-                  <a:lnTo>
-                    <a:pt x="5658179" y="549274"/>
-                  </a:lnTo>
-                  <a:lnTo>
-                    <a:pt x="5586557" y="528226"/>
-                  </a:lnTo>
-                  <a:lnTo>
-                    <a:pt x="5514934" y="505621"/>
-                  </a:lnTo>
-                  <a:lnTo>
-                    <a:pt x="5443311" y="481342"/>
-                  </a:lnTo>
-                  <a:lnTo>
-                    <a:pt x="5371689" y="455267"/>
-                  </a:lnTo>
-                  <a:lnTo>
-                    <a:pt x="5300066" y="427262"/>
-                  </a:lnTo>
-                  <a:lnTo>
-                    <a:pt x="5228444" y="397184"/>
-                  </a:lnTo>
-                  <a:lnTo>
-                    <a:pt x="5156821" y="364880"/>
-                  </a:lnTo>
-                  <a:lnTo>
-                    <a:pt x="5085199" y="330185"/>
-                  </a:lnTo>
-                  <a:lnTo>
-                    <a:pt x="5013576" y="292922"/>
-                  </a:lnTo>
-                  <a:lnTo>
-                    <a:pt x="4941954" y="252901"/>
-                  </a:lnTo>
-                  <a:lnTo>
-                    <a:pt x="4870331" y="209918"/>
-                  </a:lnTo>
-                  <a:lnTo>
-                    <a:pt x="4798709" y="163754"/>
-                  </a:lnTo>
-                  <a:lnTo>
-                    <a:pt x="4727086" y="114174"/>
-                  </a:lnTo>
-                  <a:lnTo>
-                    <a:pt x="4655464" y="60924"/>
-                  </a:lnTo>
-                  <a:lnTo>
-                    <a:pt x="4583841" y="4193"/>
-                  </a:lnTo>
-                  <a:lnTo>
-                    <a:pt x="4512219" y="4128"/>
-                  </a:lnTo>
-                  <a:lnTo>
-                    <a:pt x="4440596" y="4062"/>
-                  </a:lnTo>
-                  <a:lnTo>
-                    <a:pt x="4368974" y="3997"/>
-                  </a:lnTo>
-                  <a:lnTo>
-                    <a:pt x="4297351" y="3932"/>
-                  </a:lnTo>
-                  <a:lnTo>
-                    <a:pt x="4225729" y="3866"/>
-                  </a:lnTo>
-                  <a:lnTo>
-                    <a:pt x="4154106" y="3801"/>
-                  </a:lnTo>
-                  <a:lnTo>
-                    <a:pt x="4082483" y="3736"/>
-                  </a:lnTo>
-                  <a:lnTo>
-                    <a:pt x="4010861" y="3670"/>
-                  </a:lnTo>
-                  <a:lnTo>
-                    <a:pt x="3939238" y="3605"/>
-                  </a:lnTo>
-                  <a:lnTo>
-                    <a:pt x="3867616" y="3539"/>
-                  </a:lnTo>
-                  <a:lnTo>
-                    <a:pt x="3795993" y="3474"/>
-                  </a:lnTo>
-                  <a:lnTo>
-                    <a:pt x="3724371" y="3408"/>
-                  </a:lnTo>
-                  <a:lnTo>
-                    <a:pt x="3652748" y="3343"/>
-                  </a:lnTo>
-                  <a:lnTo>
-                    <a:pt x="3581126" y="3278"/>
-                  </a:lnTo>
-                  <a:lnTo>
-                    <a:pt x="3509503" y="3212"/>
-                  </a:lnTo>
-                  <a:lnTo>
-                    <a:pt x="3437881" y="3147"/>
-                  </a:lnTo>
-                  <a:lnTo>
-                    <a:pt x="3366258" y="3081"/>
-                  </a:lnTo>
-                  <a:lnTo>
-                    <a:pt x="3294636" y="3016"/>
-                  </a:lnTo>
-                  <a:lnTo>
-                    <a:pt x="3223013" y="2950"/>
-                  </a:lnTo>
-                  <a:lnTo>
-                    <a:pt x="3151391" y="2885"/>
-                  </a:lnTo>
-                  <a:lnTo>
-                    <a:pt x="3079768" y="2819"/>
-                  </a:lnTo>
-                  <a:lnTo>
-                    <a:pt x="3008146" y="2754"/>
-                  </a:lnTo>
-                  <a:lnTo>
-                    <a:pt x="2936523" y="2689"/>
-                  </a:lnTo>
-                  <a:lnTo>
-                    <a:pt x="2864901" y="2623"/>
-                  </a:lnTo>
-                  <a:lnTo>
-                    <a:pt x="2793278" y="2558"/>
-                  </a:lnTo>
-                  <a:lnTo>
-                    <a:pt x="2721655" y="2492"/>
-                  </a:lnTo>
-                  <a:lnTo>
-                    <a:pt x="2650033" y="2427"/>
-                  </a:lnTo>
-                  <a:lnTo>
-                    <a:pt x="2578410" y="2361"/>
-                  </a:lnTo>
-                  <a:lnTo>
-                    <a:pt x="2506788" y="2296"/>
-                  </a:lnTo>
-                  <a:lnTo>
-                    <a:pt x="2435165" y="2230"/>
-                  </a:lnTo>
-                  <a:lnTo>
-                    <a:pt x="2363543" y="2165"/>
-                  </a:lnTo>
-                  <a:lnTo>
-                    <a:pt x="2291920" y="2099"/>
-                  </a:lnTo>
-                  <a:lnTo>
-                    <a:pt x="2220298" y="2033"/>
-                  </a:lnTo>
-                  <a:lnTo>
-                    <a:pt x="2148675" y="1968"/>
-                  </a:lnTo>
-                  <a:lnTo>
-                    <a:pt x="2077053" y="1902"/>
-                  </a:lnTo>
-                  <a:lnTo>
-                    <a:pt x="2005430" y="1837"/>
-                  </a:lnTo>
-                  <a:lnTo>
-                    <a:pt x="1933808" y="1771"/>
-                  </a:lnTo>
-                  <a:lnTo>
-                    <a:pt x="1862185" y="1706"/>
-                  </a:lnTo>
-                  <a:lnTo>
-                    <a:pt x="1790563" y="1640"/>
-                  </a:lnTo>
-                  <a:lnTo>
-                    <a:pt x="1718940" y="1575"/>
-                  </a:lnTo>
-                  <a:lnTo>
-                    <a:pt x="1647318" y="1509"/>
-                  </a:lnTo>
-                  <a:lnTo>
-                    <a:pt x="1575695" y="1443"/>
-                  </a:lnTo>
-                  <a:lnTo>
-                    <a:pt x="1504073" y="1378"/>
-                  </a:lnTo>
-                  <a:lnTo>
-                    <a:pt x="1432450" y="1312"/>
-                  </a:lnTo>
-                  <a:lnTo>
-                    <a:pt x="1360827" y="1247"/>
-                  </a:lnTo>
-                  <a:lnTo>
-                    <a:pt x="1289205" y="1181"/>
-                  </a:lnTo>
-                  <a:lnTo>
-                    <a:pt x="1217582" y="1116"/>
-                  </a:lnTo>
-                  <a:lnTo>
-                    <a:pt x="1145960" y="1050"/>
-                  </a:lnTo>
-                  <a:lnTo>
-                    <a:pt x="1074337" y="984"/>
-                  </a:lnTo>
-                  <a:lnTo>
-                    <a:pt x="1002715" y="919"/>
-                  </a:lnTo>
-                  <a:lnTo>
-                    <a:pt x="931092" y="853"/>
-                  </a:lnTo>
-                  <a:lnTo>
-                    <a:pt x="859470" y="787"/>
-                  </a:lnTo>
-                  <a:lnTo>
-                    <a:pt x="787847" y="722"/>
-                  </a:lnTo>
-                  <a:lnTo>
-                    <a:pt x="716225" y="656"/>
-                  </a:lnTo>
-                  <a:lnTo>
-                    <a:pt x="644602" y="591"/>
-                  </a:lnTo>
-                  <a:lnTo>
-                    <a:pt x="572980" y="525"/>
-                  </a:lnTo>
-                  <a:lnTo>
-                    <a:pt x="501357" y="459"/>
-                  </a:lnTo>
-                  <a:lnTo>
-                    <a:pt x="429735" y="394"/>
-                  </a:lnTo>
-                  <a:lnTo>
-                    <a:pt x="358112" y="328"/>
-                  </a:lnTo>
-                  <a:lnTo>
-                    <a:pt x="286490" y="262"/>
-                  </a:lnTo>
-                  <a:lnTo>
-                    <a:pt x="214867" y="197"/>
-                  </a:lnTo>
-                  <a:lnTo>
-                    <a:pt x="143245" y="131"/>
-                  </a:lnTo>
-                  <a:lnTo>
-                    <a:pt x="71622" y="65"/>
-                  </a:lnTo>
-                  <a:lnTo>
-                    <a:pt x="0" y="0"/>
+                    <a:pt x="7019007" y="755265"/>
+                  </a:lnTo>
+                  <a:lnTo>
+                    <a:pt x="6947385" y="749799"/>
+                  </a:lnTo>
+                  <a:lnTo>
+                    <a:pt x="6875762" y="743930"/>
+                  </a:lnTo>
+                  <a:lnTo>
+                    <a:pt x="6804139" y="737629"/>
+                  </a:lnTo>
+                  <a:lnTo>
+                    <a:pt x="6732517" y="730863"/>
+                  </a:lnTo>
+                  <a:lnTo>
+                    <a:pt x="6660894" y="723598"/>
+                  </a:lnTo>
+                  <a:lnTo>
+                    <a:pt x="6589272" y="715798"/>
+                  </a:lnTo>
+                  <a:lnTo>
+                    <a:pt x="6517649" y="707423"/>
+                  </a:lnTo>
+                  <a:lnTo>
+                    <a:pt x="6446027" y="698431"/>
+                  </a:lnTo>
+                  <a:lnTo>
+                    <a:pt x="6374404" y="688776"/>
+                  </a:lnTo>
+                  <a:lnTo>
+                    <a:pt x="6302782" y="678410"/>
+                  </a:lnTo>
+                  <a:lnTo>
+                    <a:pt x="6231159" y="667279"/>
+                  </a:lnTo>
+                  <a:lnTo>
+                    <a:pt x="6159537" y="655328"/>
+                  </a:lnTo>
+                  <a:lnTo>
+                    <a:pt x="6087914" y="642496"/>
+                  </a:lnTo>
+                  <a:lnTo>
+                    <a:pt x="6016292" y="628719"/>
+                  </a:lnTo>
+                  <a:lnTo>
+                    <a:pt x="5944669" y="613926"/>
+                  </a:lnTo>
+                  <a:lnTo>
+                    <a:pt x="5873047" y="598042"/>
+                  </a:lnTo>
+                  <a:lnTo>
+                    <a:pt x="5801424" y="580989"/>
+                  </a:lnTo>
+                  <a:lnTo>
+                    <a:pt x="5729802" y="562678"/>
+                  </a:lnTo>
+                  <a:lnTo>
+                    <a:pt x="5658179" y="543017"/>
+                  </a:lnTo>
+                  <a:lnTo>
+                    <a:pt x="5586557" y="521908"/>
+                  </a:lnTo>
+                  <a:lnTo>
+                    <a:pt x="5514934" y="499242"/>
+                  </a:lnTo>
+                  <a:lnTo>
+                    <a:pt x="5443311" y="474907"/>
+                  </a:lnTo>
+                  <a:lnTo>
+                    <a:pt x="5371689" y="448777"/>
+                  </a:lnTo>
+                  <a:lnTo>
+                    <a:pt x="5300066" y="420722"/>
+                  </a:lnTo>
+                  <a:lnTo>
+                    <a:pt x="5228444" y="390599"/>
+                  </a:lnTo>
+                  <a:lnTo>
+                    <a:pt x="5156821" y="358256"/>
+                  </a:lnTo>
+                  <a:lnTo>
+                    <a:pt x="5085199" y="323529"/>
+                  </a:lnTo>
+                  <a:lnTo>
+                    <a:pt x="5013576" y="286242"/>
+                  </a:lnTo>
+                  <a:lnTo>
+                    <a:pt x="4941954" y="246207"/>
+                  </a:lnTo>
+                  <a:lnTo>
+                    <a:pt x="4870331" y="203222"/>
+                  </a:lnTo>
+                  <a:lnTo>
+                    <a:pt x="4798709" y="157069"/>
+                  </a:lnTo>
+                  <a:lnTo>
+                    <a:pt x="4727086" y="107513"/>
+                  </a:lnTo>
+                  <a:lnTo>
+                    <a:pt x="4655464" y="54306"/>
+                  </a:lnTo>
+                  <a:lnTo>
+                    <a:pt x="4583841" y="0"/>
+                  </a:lnTo>
+                  <a:lnTo>
+                    <a:pt x="4512219" y="728"/>
+                  </a:lnTo>
+                  <a:lnTo>
+                    <a:pt x="4440596" y="1456"/>
+                  </a:lnTo>
+                  <a:lnTo>
+                    <a:pt x="4368974" y="2183"/>
+                  </a:lnTo>
+                  <a:lnTo>
+                    <a:pt x="4297351" y="2909"/>
+                  </a:lnTo>
+                  <a:lnTo>
+                    <a:pt x="4225729" y="3635"/>
+                  </a:lnTo>
+                  <a:lnTo>
+                    <a:pt x="4154106" y="4361"/>
+                  </a:lnTo>
+                  <a:lnTo>
+                    <a:pt x="4082483" y="5085"/>
+                  </a:lnTo>
+                  <a:lnTo>
+                    <a:pt x="4010861" y="5809"/>
+                  </a:lnTo>
+                  <a:lnTo>
+                    <a:pt x="3939238" y="6533"/>
+                  </a:lnTo>
+                  <a:lnTo>
+                    <a:pt x="3867616" y="7255"/>
+                  </a:lnTo>
+                  <a:lnTo>
+                    <a:pt x="3795993" y="7977"/>
+                  </a:lnTo>
+                  <a:lnTo>
+                    <a:pt x="3724371" y="8699"/>
+                  </a:lnTo>
+                  <a:lnTo>
+                    <a:pt x="3652748" y="9420"/>
+                  </a:lnTo>
+                  <a:lnTo>
+                    <a:pt x="3581126" y="10140"/>
+                  </a:lnTo>
+                  <a:lnTo>
+                    <a:pt x="3509503" y="10859"/>
+                  </a:lnTo>
+                  <a:lnTo>
+                    <a:pt x="3437881" y="11578"/>
+                  </a:lnTo>
+                  <a:lnTo>
+                    <a:pt x="3366258" y="12296"/>
+                  </a:lnTo>
+                  <a:lnTo>
+                    <a:pt x="3294636" y="13014"/>
+                  </a:lnTo>
+                  <a:lnTo>
+                    <a:pt x="3223013" y="13731"/>
+                  </a:lnTo>
+                  <a:lnTo>
+                    <a:pt x="3151391" y="14447"/>
+                  </a:lnTo>
+                  <a:lnTo>
+                    <a:pt x="3079768" y="15163"/>
+                  </a:lnTo>
+                  <a:lnTo>
+                    <a:pt x="3008146" y="15878"/>
+                  </a:lnTo>
+                  <a:lnTo>
+                    <a:pt x="2936523" y="16593"/>
+                  </a:lnTo>
+                  <a:lnTo>
+                    <a:pt x="2864901" y="17307"/>
+                  </a:lnTo>
+                  <a:lnTo>
+                    <a:pt x="2793278" y="18020"/>
+                  </a:lnTo>
+                  <a:lnTo>
+                    <a:pt x="2721655" y="18733"/>
+                  </a:lnTo>
+                  <a:lnTo>
+                    <a:pt x="2650033" y="19445"/>
+                  </a:lnTo>
+                  <a:lnTo>
+                    <a:pt x="2578410" y="20156"/>
+                  </a:lnTo>
+                  <a:lnTo>
+                    <a:pt x="2506788" y="20867"/>
+                  </a:lnTo>
+                  <a:lnTo>
+                    <a:pt x="2435165" y="21577"/>
+                  </a:lnTo>
+                  <a:lnTo>
+                    <a:pt x="2363543" y="22286"/>
+                  </a:lnTo>
+                  <a:lnTo>
+                    <a:pt x="2291920" y="22995"/>
+                  </a:lnTo>
+                  <a:lnTo>
+                    <a:pt x="2220298" y="23703"/>
+                  </a:lnTo>
+                  <a:lnTo>
+                    <a:pt x="2148675" y="24411"/>
+                  </a:lnTo>
+                  <a:lnTo>
+                    <a:pt x="2077053" y="25118"/>
+                  </a:lnTo>
+                  <a:lnTo>
+                    <a:pt x="2005430" y="25824"/>
+                  </a:lnTo>
+                  <a:lnTo>
+                    <a:pt x="1933808" y="26530"/>
+                  </a:lnTo>
+                  <a:lnTo>
+                    <a:pt x="1862185" y="27235"/>
+                  </a:lnTo>
+                  <a:lnTo>
+                    <a:pt x="1790563" y="27940"/>
+                  </a:lnTo>
+                  <a:lnTo>
+                    <a:pt x="1718940" y="28644"/>
+                  </a:lnTo>
+                  <a:lnTo>
+                    <a:pt x="1647318" y="29347"/>
+                  </a:lnTo>
+                  <a:lnTo>
+                    <a:pt x="1575695" y="30050"/>
+                  </a:lnTo>
+                  <a:lnTo>
+                    <a:pt x="1504073" y="30752"/>
+                  </a:lnTo>
+                  <a:lnTo>
+                    <a:pt x="1432450" y="31453"/>
+                  </a:lnTo>
+                  <a:lnTo>
+                    <a:pt x="1360827" y="32154"/>
+                  </a:lnTo>
+                  <a:lnTo>
+                    <a:pt x="1289205" y="32854"/>
+                  </a:lnTo>
+                  <a:lnTo>
+                    <a:pt x="1217582" y="33554"/>
+                  </a:lnTo>
+                  <a:lnTo>
+                    <a:pt x="1145960" y="34253"/>
+                  </a:lnTo>
+                  <a:lnTo>
+                    <a:pt x="1074337" y="34951"/>
+                  </a:lnTo>
+                  <a:lnTo>
+                    <a:pt x="1002715" y="35649"/>
+                  </a:lnTo>
+                  <a:lnTo>
+                    <a:pt x="931092" y="36346"/>
+                  </a:lnTo>
+                  <a:lnTo>
+                    <a:pt x="859470" y="37043"/>
+                  </a:lnTo>
+                  <a:lnTo>
+                    <a:pt x="787847" y="37739"/>
+                  </a:lnTo>
+                  <a:lnTo>
+                    <a:pt x="716225" y="38434"/>
+                  </a:lnTo>
+                  <a:lnTo>
+                    <a:pt x="644602" y="39129"/>
+                  </a:lnTo>
+                  <a:lnTo>
+                    <a:pt x="572980" y="39823"/>
+                  </a:lnTo>
+                  <a:lnTo>
+                    <a:pt x="501357" y="40516"/>
+                  </a:lnTo>
+                  <a:lnTo>
+                    <a:pt x="429735" y="41209"/>
+                  </a:lnTo>
+                  <a:lnTo>
+                    <a:pt x="358112" y="41901"/>
+                  </a:lnTo>
+                  <a:lnTo>
+                    <a:pt x="286490" y="42593"/>
+                  </a:lnTo>
+                  <a:lnTo>
+                    <a:pt x="214867" y="43284"/>
+                  </a:lnTo>
+                  <a:lnTo>
+                    <a:pt x="143245" y="43974"/>
+                  </a:lnTo>
+                  <a:lnTo>
+                    <a:pt x="71622" y="44664"/>
+                  </a:lnTo>
+                  <a:lnTo>
+                    <a:pt x="0" y="45353"/>
                   </a:lnTo>
                 </a:path>
               </a:pathLst>
@@ -3942,243 +3942,243 @@
           </p:nvSpPr>
           <p:spPr>
             <a:xfrm>
-              <a:off x="2880700" y="2073503"/>
-              <a:ext cx="5381978" cy="3246247"/>
+              <a:off x="2832592" y="2073503"/>
+              <a:ext cx="5430086" cy="3240683"/>
             </a:xfrm>
             <a:custGeom>
               <a:avLst/>
               <a:pathLst>
-                <a:path w="5381978" h="3246247">
+                <a:path w="5430086" h="3240683">
                   <a:moveTo>
                     <a:pt x="0" y="0"/>
                   </a:moveTo>
                   <a:lnTo>
-                    <a:pt x="10289" y="18115"/>
-                  </a:lnTo>
-                  <a:lnTo>
-                    <a:pt x="81911" y="139789"/>
-                  </a:lnTo>
-                  <a:lnTo>
-                    <a:pt x="153534" y="257191"/>
-                  </a:lnTo>
-                  <a:lnTo>
-                    <a:pt x="225156" y="370471"/>
-                  </a:lnTo>
-                  <a:lnTo>
-                    <a:pt x="296779" y="479774"/>
-                  </a:lnTo>
-                  <a:lnTo>
-                    <a:pt x="368402" y="585240"/>
-                  </a:lnTo>
-                  <a:lnTo>
-                    <a:pt x="440024" y="687003"/>
-                  </a:lnTo>
-                  <a:lnTo>
-                    <a:pt x="511647" y="785193"/>
-                  </a:lnTo>
-                  <a:lnTo>
-                    <a:pt x="583269" y="879935"/>
-                  </a:lnTo>
-                  <a:lnTo>
-                    <a:pt x="654892" y="971352"/>
-                  </a:lnTo>
-                  <a:lnTo>
-                    <a:pt x="726514" y="1059558"/>
-                  </a:lnTo>
-                  <a:lnTo>
-                    <a:pt x="798137" y="1144669"/>
-                  </a:lnTo>
-                  <a:lnTo>
-                    <a:pt x="869759" y="1226791"/>
-                  </a:lnTo>
-                  <a:lnTo>
-                    <a:pt x="941382" y="1306029"/>
-                  </a:lnTo>
-                  <a:lnTo>
-                    <a:pt x="1013004" y="1382486"/>
-                  </a:lnTo>
-                  <a:lnTo>
-                    <a:pt x="1084627" y="1456259"/>
-                  </a:lnTo>
-                  <a:lnTo>
-                    <a:pt x="1156249" y="1527441"/>
-                  </a:lnTo>
-                  <a:lnTo>
-                    <a:pt x="1227872" y="1596124"/>
-                  </a:lnTo>
-                  <a:lnTo>
-                    <a:pt x="1299494" y="1662396"/>
-                  </a:lnTo>
-                  <a:lnTo>
-                    <a:pt x="1371117" y="1726341"/>
-                  </a:lnTo>
-                  <a:lnTo>
-                    <a:pt x="1442739" y="1788042"/>
-                  </a:lnTo>
-                  <a:lnTo>
-                    <a:pt x="1514362" y="1847576"/>
-                  </a:lnTo>
-                  <a:lnTo>
-                    <a:pt x="1585984" y="1905019"/>
-                  </a:lnTo>
-                  <a:lnTo>
-                    <a:pt x="1657607" y="1960446"/>
-                  </a:lnTo>
-                  <a:lnTo>
-                    <a:pt x="1729230" y="2013928"/>
-                  </a:lnTo>
-                  <a:lnTo>
-                    <a:pt x="1800852" y="2065531"/>
-                  </a:lnTo>
-                  <a:lnTo>
-                    <a:pt x="1872475" y="2115323"/>
-                  </a:lnTo>
-                  <a:lnTo>
-                    <a:pt x="1944097" y="2163366"/>
-                  </a:lnTo>
-                  <a:lnTo>
-                    <a:pt x="2015720" y="2209723"/>
-                  </a:lnTo>
-                  <a:lnTo>
-                    <a:pt x="2087342" y="2254452"/>
-                  </a:lnTo>
-                  <a:lnTo>
-                    <a:pt x="2158965" y="2297611"/>
-                  </a:lnTo>
-                  <a:lnTo>
-                    <a:pt x="2230587" y="2339255"/>
-                  </a:lnTo>
-                  <a:lnTo>
-                    <a:pt x="2302210" y="2379436"/>
-                  </a:lnTo>
-                  <a:lnTo>
-                    <a:pt x="2373832" y="2418207"/>
-                  </a:lnTo>
-                  <a:lnTo>
-                    <a:pt x="2445455" y="2455617"/>
-                  </a:lnTo>
-                  <a:lnTo>
-                    <a:pt x="2517077" y="2491713"/>
-                  </a:lnTo>
-                  <a:lnTo>
-                    <a:pt x="2588700" y="2526542"/>
-                  </a:lnTo>
-                  <a:lnTo>
-                    <a:pt x="2660322" y="2560148"/>
-                  </a:lnTo>
-                  <a:lnTo>
-                    <a:pt x="2731945" y="2592575"/>
-                  </a:lnTo>
-                  <a:lnTo>
-                    <a:pt x="2803567" y="2623863"/>
-                  </a:lnTo>
-                  <a:lnTo>
-                    <a:pt x="2875190" y="2654052"/>
-                  </a:lnTo>
-                  <a:lnTo>
-                    <a:pt x="2946812" y="2683182"/>
-                  </a:lnTo>
-                  <a:lnTo>
-                    <a:pt x="3018435" y="2711288"/>
-                  </a:lnTo>
-                  <a:lnTo>
-                    <a:pt x="3090058" y="2738408"/>
-                  </a:lnTo>
-                  <a:lnTo>
-                    <a:pt x="3161680" y="2764576"/>
-                  </a:lnTo>
-                  <a:lnTo>
-                    <a:pt x="3233303" y="2789825"/>
-                  </a:lnTo>
-                  <a:lnTo>
-                    <a:pt x="3304925" y="2814188"/>
-                  </a:lnTo>
-                  <a:lnTo>
-                    <a:pt x="3376548" y="2837695"/>
-                  </a:lnTo>
-                  <a:lnTo>
-                    <a:pt x="3448170" y="2860377"/>
-                  </a:lnTo>
-                  <a:lnTo>
-                    <a:pt x="3519793" y="2882263"/>
-                  </a:lnTo>
-                  <a:lnTo>
-                    <a:pt x="3591415" y="2903380"/>
-                  </a:lnTo>
-                  <a:lnTo>
-                    <a:pt x="3663038" y="2923756"/>
-                  </a:lnTo>
-                  <a:lnTo>
-                    <a:pt x="3734660" y="2943417"/>
-                  </a:lnTo>
-                  <a:lnTo>
-                    <a:pt x="3806283" y="2962387"/>
-                  </a:lnTo>
-                  <a:lnTo>
-                    <a:pt x="3877905" y="2980691"/>
-                  </a:lnTo>
-                  <a:lnTo>
-                    <a:pt x="3949528" y="2998353"/>
-                  </a:lnTo>
-                  <a:lnTo>
-                    <a:pt x="4021150" y="3015394"/>
-                  </a:lnTo>
-                  <a:lnTo>
-                    <a:pt x="4092773" y="3031838"/>
-                  </a:lnTo>
-                  <a:lnTo>
-                    <a:pt x="4164395" y="3047703"/>
-                  </a:lnTo>
-                  <a:lnTo>
-                    <a:pt x="4236018" y="3063012"/>
-                  </a:lnTo>
-                  <a:lnTo>
-                    <a:pt x="4307640" y="3077784"/>
-                  </a:lnTo>
-                  <a:lnTo>
-                    <a:pt x="4379263" y="3092037"/>
-                  </a:lnTo>
-                  <a:lnTo>
-                    <a:pt x="4450886" y="3105789"/>
-                  </a:lnTo>
-                  <a:lnTo>
-                    <a:pt x="4522508" y="3119059"/>
-                  </a:lnTo>
-                  <a:lnTo>
-                    <a:pt x="4594131" y="3131862"/>
-                  </a:lnTo>
-                  <a:lnTo>
-                    <a:pt x="4665753" y="3144216"/>
-                  </a:lnTo>
-                  <a:lnTo>
-                    <a:pt x="4737376" y="3156137"/>
-                  </a:lnTo>
-                  <a:lnTo>
-                    <a:pt x="4808998" y="3167639"/>
-                  </a:lnTo>
-                  <a:lnTo>
-                    <a:pt x="4880621" y="3178737"/>
-                  </a:lnTo>
-                  <a:lnTo>
-                    <a:pt x="4952243" y="3189445"/>
-                  </a:lnTo>
-                  <a:lnTo>
-                    <a:pt x="5023866" y="3199778"/>
-                  </a:lnTo>
-                  <a:lnTo>
-                    <a:pt x="5095488" y="3209748"/>
-                  </a:lnTo>
-                  <a:lnTo>
-                    <a:pt x="5167111" y="3219367"/>
-                  </a:lnTo>
-                  <a:lnTo>
-                    <a:pt x="5238733" y="3228649"/>
-                  </a:lnTo>
-                  <a:lnTo>
-                    <a:pt x="5310356" y="3237606"/>
-                  </a:lnTo>
-                  <a:lnTo>
-                    <a:pt x="5381978" y="3246247"/>
+                    <a:pt x="58397" y="98647"/>
+                  </a:lnTo>
+                  <a:lnTo>
+                    <a:pt x="130019" y="215460"/>
+                  </a:lnTo>
+                  <a:lnTo>
+                    <a:pt x="201642" y="328243"/>
+                  </a:lnTo>
+                  <a:lnTo>
+                    <a:pt x="273264" y="437133"/>
+                  </a:lnTo>
+                  <a:lnTo>
+                    <a:pt x="344887" y="542266"/>
+                  </a:lnTo>
+                  <a:lnTo>
+                    <a:pt x="416509" y="643771"/>
+                  </a:lnTo>
+                  <a:lnTo>
+                    <a:pt x="488132" y="741773"/>
+                  </a:lnTo>
+                  <a:lnTo>
+                    <a:pt x="559754" y="836393"/>
+                  </a:lnTo>
+                  <a:lnTo>
+                    <a:pt x="631377" y="927748"/>
+                  </a:lnTo>
+                  <a:lnTo>
+                    <a:pt x="703000" y="1015951"/>
+                  </a:lnTo>
+                  <a:lnTo>
+                    <a:pt x="774622" y="1101110"/>
+                  </a:lnTo>
+                  <a:lnTo>
+                    <a:pt x="846245" y="1183330"/>
+                  </a:lnTo>
+                  <a:lnTo>
+                    <a:pt x="917867" y="1262713"/>
+                  </a:lnTo>
+                  <a:lnTo>
+                    <a:pt x="989490" y="1339356"/>
+                  </a:lnTo>
+                  <a:lnTo>
+                    <a:pt x="1061112" y="1413355"/>
+                  </a:lnTo>
+                  <a:lnTo>
+                    <a:pt x="1132735" y="1484801"/>
+                  </a:lnTo>
+                  <a:lnTo>
+                    <a:pt x="1204357" y="1553780"/>
+                  </a:lnTo>
+                  <a:lnTo>
+                    <a:pt x="1275980" y="1620380"/>
+                  </a:lnTo>
+                  <a:lnTo>
+                    <a:pt x="1347602" y="1684681"/>
+                  </a:lnTo>
+                  <a:lnTo>
+                    <a:pt x="1419225" y="1746763"/>
+                  </a:lnTo>
+                  <a:lnTo>
+                    <a:pt x="1490847" y="1806703"/>
+                  </a:lnTo>
+                  <a:lnTo>
+                    <a:pt x="1562470" y="1864575"/>
+                  </a:lnTo>
+                  <a:lnTo>
+                    <a:pt x="1634092" y="1920449"/>
+                  </a:lnTo>
+                  <a:lnTo>
+                    <a:pt x="1705715" y="1974396"/>
+                  </a:lnTo>
+                  <a:lnTo>
+                    <a:pt x="1777337" y="2026480"/>
+                  </a:lnTo>
+                  <a:lnTo>
+                    <a:pt x="1848960" y="2076768"/>
+                  </a:lnTo>
+                  <a:lnTo>
+                    <a:pt x="1920582" y="2125320"/>
+                  </a:lnTo>
+                  <a:lnTo>
+                    <a:pt x="1992205" y="2172197"/>
+                  </a:lnTo>
+                  <a:lnTo>
+                    <a:pt x="2063828" y="2217456"/>
+                  </a:lnTo>
+                  <a:lnTo>
+                    <a:pt x="2135450" y="2261153"/>
+                  </a:lnTo>
+                  <a:lnTo>
+                    <a:pt x="2207073" y="2303342"/>
+                  </a:lnTo>
+                  <a:lnTo>
+                    <a:pt x="2278695" y="2344076"/>
+                  </a:lnTo>
+                  <a:lnTo>
+                    <a:pt x="2350318" y="2383404"/>
+                  </a:lnTo>
+                  <a:lnTo>
+                    <a:pt x="2421940" y="2421374"/>
+                  </a:lnTo>
+                  <a:lnTo>
+                    <a:pt x="2493563" y="2458035"/>
+                  </a:lnTo>
+                  <a:lnTo>
+                    <a:pt x="2565185" y="2493430"/>
+                  </a:lnTo>
+                  <a:lnTo>
+                    <a:pt x="2636808" y="2527604"/>
+                  </a:lnTo>
+                  <a:lnTo>
+                    <a:pt x="2708430" y="2560599"/>
+                  </a:lnTo>
+                  <a:lnTo>
+                    <a:pt x="2780053" y="2592455"/>
+                  </a:lnTo>
+                  <a:lnTo>
+                    <a:pt x="2851675" y="2623212"/>
+                  </a:lnTo>
+                  <a:lnTo>
+                    <a:pt x="2923298" y="2652907"/>
+                  </a:lnTo>
+                  <a:lnTo>
+                    <a:pt x="2994920" y="2681578"/>
+                  </a:lnTo>
+                  <a:lnTo>
+                    <a:pt x="3066543" y="2709259"/>
+                  </a:lnTo>
+                  <a:lnTo>
+                    <a:pt x="3138165" y="2735985"/>
+                  </a:lnTo>
+                  <a:lnTo>
+                    <a:pt x="3209788" y="2761789"/>
+                  </a:lnTo>
+                  <a:lnTo>
+                    <a:pt x="3281410" y="2786702"/>
+                  </a:lnTo>
+                  <a:lnTo>
+                    <a:pt x="3353033" y="2810756"/>
+                  </a:lnTo>
+                  <a:lnTo>
+                    <a:pt x="3424656" y="2833980"/>
+                  </a:lnTo>
+                  <a:lnTo>
+                    <a:pt x="3496278" y="2856402"/>
+                  </a:lnTo>
+                  <a:lnTo>
+                    <a:pt x="3567901" y="2878050"/>
+                  </a:lnTo>
+                  <a:lnTo>
+                    <a:pt x="3639523" y="2898952"/>
+                  </a:lnTo>
+                  <a:lnTo>
+                    <a:pt x="3711146" y="2919132"/>
+                  </a:lnTo>
+                  <a:lnTo>
+                    <a:pt x="3782768" y="2938616"/>
+                  </a:lnTo>
+                  <a:lnTo>
+                    <a:pt x="3854391" y="2957427"/>
+                  </a:lnTo>
+                  <a:lnTo>
+                    <a:pt x="3926013" y="2975589"/>
+                  </a:lnTo>
+                  <a:lnTo>
+                    <a:pt x="3997636" y="2993125"/>
+                  </a:lnTo>
+                  <a:lnTo>
+                    <a:pt x="4069258" y="3010055"/>
+                  </a:lnTo>
+                  <a:lnTo>
+                    <a:pt x="4140881" y="3026401"/>
+                  </a:lnTo>
+                  <a:lnTo>
+                    <a:pt x="4212503" y="3042183"/>
+                  </a:lnTo>
+                  <a:lnTo>
+                    <a:pt x="4284126" y="3057421"/>
+                  </a:lnTo>
+                  <a:lnTo>
+                    <a:pt x="4355748" y="3072133"/>
+                  </a:lnTo>
+                  <a:lnTo>
+                    <a:pt x="4427371" y="3086337"/>
+                  </a:lnTo>
+                  <a:lnTo>
+                    <a:pt x="4498993" y="3100050"/>
+                  </a:lnTo>
+                  <a:lnTo>
+                    <a:pt x="4570616" y="3113291"/>
+                  </a:lnTo>
+                  <a:lnTo>
+                    <a:pt x="4642238" y="3126075"/>
+                  </a:lnTo>
+                  <a:lnTo>
+                    <a:pt x="4713861" y="3138417"/>
+                  </a:lnTo>
+                  <a:lnTo>
+                    <a:pt x="4785483" y="3150334"/>
+                  </a:lnTo>
+                  <a:lnTo>
+                    <a:pt x="4857106" y="3161839"/>
+                  </a:lnTo>
+                  <a:lnTo>
+                    <a:pt x="4928729" y="3172948"/>
+                  </a:lnTo>
+                  <a:lnTo>
+                    <a:pt x="5000351" y="3183673"/>
+                  </a:lnTo>
+                  <a:lnTo>
+                    <a:pt x="5071974" y="3194028"/>
+                  </a:lnTo>
+                  <a:lnTo>
+                    <a:pt x="5143596" y="3204025"/>
+                  </a:lnTo>
+                  <a:lnTo>
+                    <a:pt x="5215219" y="3213678"/>
+                  </a:lnTo>
+                  <a:lnTo>
+                    <a:pt x="5286841" y="3222998"/>
+                  </a:lnTo>
+                  <a:lnTo>
+                    <a:pt x="5358464" y="3231996"/>
+                  </a:lnTo>
+                  <a:lnTo>
+                    <a:pt x="5430086" y="3240683"/>
                   </a:lnTo>
                 </a:path>
               </a:pathLst>
@@ -4250,7 +4250,7 @@
           </p:nvSpPr>
           <p:spPr>
             <a:xfrm>
-              <a:off x="5756448" y="2073503"/>
+              <a:off x="5759271" y="2073503"/>
               <a:ext cx="0" cy="3649639"/>
             </a:xfrm>
             <a:custGeom>
@@ -4293,7 +4293,7 @@
           </p:nvSpPr>
           <p:spPr>
             <a:xfrm>
-              <a:off x="4469314" y="2073503"/>
+              <a:off x="4504692" y="2073503"/>
               <a:ext cx="0" cy="3649639"/>
             </a:xfrm>
             <a:custGeom>
@@ -4336,7 +4336,7 @@
           </p:nvSpPr>
           <p:spPr>
             <a:xfrm>
-              <a:off x="6872676" y="2073503"/>
+              <a:off x="6871070" y="2073503"/>
               <a:ext cx="0" cy="3649639"/>
             </a:xfrm>
             <a:custGeom>
@@ -4609,7 +4609,7 @@
           </p:nvSpPr>
           <p:spPr>
             <a:xfrm>
-              <a:off x="3199861" y="5785772"/>
+              <a:off x="3201825" y="5785772"/>
               <a:ext cx="161574" cy="80101"/>
             </a:xfrm>
             <a:prstGeom prst="rect">
@@ -4655,7 +4655,7 @@
           </p:nvSpPr>
           <p:spPr>
             <a:xfrm>
-              <a:off x="5730225" y="5785772"/>
+              <a:off x="5727471" y="5785772"/>
               <a:ext cx="62179" cy="80101"/>
             </a:xfrm>
             <a:prstGeom prst="rect">
@@ -4701,7 +4701,7 @@
           </p:nvSpPr>
           <p:spPr>
             <a:xfrm>
-              <a:off x="8179802" y="5785772"/>
+              <a:off x="8172329" y="5785772"/>
               <a:ext cx="124358" cy="80101"/>
             </a:xfrm>
             <a:prstGeom prst="rect">
@@ -4872,7 +4872,7 @@
                   <a:latin typeface="Helvetica"/>
                   <a:cs typeface="Helvetica"/>
                 </a:rPr>
-                <a:t>subHR per 10 mL/min decline: 1.64 (1.00-2.69), p_Bonf = 0.297 (n = 6)  |  per IQR decline (Δ = 24.2): 3.32 (1.00-10.98)  |  IQR: [-13.0, 11.2]</a:t>
+                <a:t>subHR per 10 mL/min decline: 1.63 (0.99-2.67), p_Bonf = 0.335 (n = 6)  |  per IQR decline (Δ = 23.9): 3.19 (0.97-10.48)  |  IQR: [-12.7, 11.2]</a:t>
               </a:r>
             </a:p>
           </p:txBody>
